--- a/Oak&Glass.pptx
+++ b/Oak&Glass.pptx
@@ -17,15 +17,21 @@
     <p:sldId id="266" r:id="rId11"/>
     <p:sldId id="267" r:id="rId12"/>
     <p:sldId id="268" r:id="rId13"/>
-    <p:sldId id="257" r:id="rId14"/>
+    <p:sldId id="270" r:id="rId14"/>
+    <p:sldId id="271" r:id="rId15"/>
+    <p:sldId id="272" r:id="rId16"/>
+    <p:sldId id="273" r:id="rId17"/>
+    <p:sldId id="274" r:id="rId18"/>
+    <p:sldId id="275" r:id="rId19"/>
+    <p:sldId id="257" r:id="rId20"/>
   </p:sldIdLst>
   <p:sldSz cx="12192000" cy="6858000"/>
   <p:notesSz cx="6858000" cy="9144000"/>
   <p:embeddedFontLst>
     <p:embeddedFont>
-      <p:font typeface="Texturina" pitchFamily="2" charset="-18"/>
-      <p:regular r:id="rId15"/>
-      <p:bold r:id="rId16"/>
+      <p:font typeface="Texturina" pitchFamily="2" charset="0"/>
+      <p:regular r:id="rId21"/>
+      <p:bold r:id="rId22"/>
     </p:embeddedFont>
   </p:embeddedFontLst>
   <p:defaultTextStyle>
@@ -3851,7 +3857,7 @@
           <p:cNvPr id="2" name="Cím 1">
             <a:extLst>
               <a:ext uri="{FF2B5EF4-FFF2-40B4-BE49-F238E27FC236}">
-                <a16:creationId xmlns:a16="http://schemas.microsoft.com/office/drawing/2014/main" id="{69EB0A09-B667-DEA9-EF7F-81B705D7EA83}"/>
+                <a16:creationId xmlns:a16="http://schemas.microsoft.com/office/drawing/2014/main" id="{3A429886-72E6-D888-D62C-04F7A0FCD7E6}"/>
               </a:ext>
             </a:extLst>
           </p:cNvPr>
@@ -3882,6 +3888,1339 @@
           </a:effectLst>
         </p:spPr>
         <p:txBody>
+          <a:bodyPr>
+            <a:normAutofit/>
+          </a:bodyPr>
+          <a:lstStyle/>
+          <a:p>
+            <a:r>
+              <a:rPr lang="en-GB" dirty="0"/>
+              <a:t>Backend, Deploy &amp; </a:t>
+            </a:r>
+            <a:r>
+              <a:rPr lang="en-GB" dirty="0" err="1"/>
+              <a:t>Elérés</a:t>
+            </a:r>
+            <a:endParaRPr lang="hu-HU" dirty="0"/>
+          </a:p>
+        </p:txBody>
+      </p:sp>
+    </p:spTree>
+    <p:extLst>
+      <p:ext uri="{BB962C8B-B14F-4D97-AF65-F5344CB8AC3E}">
+        <p14:creationId xmlns:p14="http://schemas.microsoft.com/office/powerpoint/2010/main" val="1095004325"/>
+      </p:ext>
+    </p:extLst>
+  </p:cSld>
+  <p:clrMapOvr>
+    <a:masterClrMapping/>
+  </p:clrMapOvr>
+</p:sld>
+</file>
+
+<file path=ppt/slides/slide14.xml><?xml version="1.0" encoding="utf-8"?>
+<p:sld xmlns:a="http://schemas.openxmlformats.org/drawingml/2006/main" xmlns:r="http://schemas.openxmlformats.org/officeDocument/2006/relationships" xmlns:p="http://schemas.openxmlformats.org/presentationml/2006/main">
+  <p:cSld>
+    <p:spTree>
+      <p:nvGrpSpPr>
+        <p:cNvPr id="1" name=""/>
+        <p:cNvGrpSpPr/>
+        <p:nvPr/>
+      </p:nvGrpSpPr>
+      <p:grpSpPr>
+        <a:xfrm>
+          <a:off x="0" y="0"/>
+          <a:ext cx="0" cy="0"/>
+          <a:chOff x="0" y="0"/>
+          <a:chExt cx="0" cy="0"/>
+        </a:xfrm>
+      </p:grpSpPr>
+      <p:sp>
+        <p:nvSpPr>
+          <p:cNvPr id="2" name="Cím 1">
+            <a:extLst>
+              <a:ext uri="{FF2B5EF4-FFF2-40B4-BE49-F238E27FC236}">
+                <a16:creationId xmlns:a16="http://schemas.microsoft.com/office/drawing/2014/main" id="{50B58FDF-5FF9-B59E-1ABA-0D5415EEF67F}"/>
+              </a:ext>
+            </a:extLst>
+          </p:cNvPr>
+          <p:cNvSpPr>
+            <a:spLocks noGrp="1"/>
+          </p:cNvSpPr>
+          <p:nvPr>
+            <p:ph type="title"/>
+          </p:nvPr>
+        </p:nvSpPr>
+        <p:spPr/>
+        <p:txBody>
+          <a:bodyPr/>
+          <a:lstStyle/>
+          <a:p>
+            <a:r>
+              <a:rPr lang="en-GB" dirty="0" err="1"/>
+              <a:t>Biztonság</a:t>
+            </a:r>
+            <a:endParaRPr lang="hu-HU" dirty="0"/>
+          </a:p>
+        </p:txBody>
+      </p:sp>
+      <p:sp>
+        <p:nvSpPr>
+          <p:cNvPr id="3" name="Tartalom helye 2">
+            <a:extLst>
+              <a:ext uri="{FF2B5EF4-FFF2-40B4-BE49-F238E27FC236}">
+                <a16:creationId xmlns:a16="http://schemas.microsoft.com/office/drawing/2014/main" id="{CDF43483-0AC2-FDC8-466D-9A6C4176AE02}"/>
+              </a:ext>
+            </a:extLst>
+          </p:cNvPr>
+          <p:cNvSpPr>
+            <a:spLocks noGrp="1"/>
+          </p:cNvSpPr>
+          <p:nvPr>
+            <p:ph idx="1"/>
+          </p:nvPr>
+        </p:nvSpPr>
+        <p:spPr>
+          <a:solidFill>
+            <a:srgbClr val="FFF3F3"/>
+          </a:solidFill>
+          <a:ln>
+            <a:noFill/>
+          </a:ln>
+          <a:effectLst>
+            <a:outerShdw blurRad="149987" dist="250190" dir="8460000" algn="ctr">
+              <a:srgbClr val="000000">
+                <a:alpha val="28000"/>
+              </a:srgbClr>
+            </a:outerShdw>
+          </a:effectLst>
+        </p:spPr>
+        <p:txBody>
+          <a:bodyPr/>
+          <a:lstStyle/>
+          <a:p>
+            <a:r>
+              <a:rPr lang="en-GB" dirty="0"/>
+              <a:t>Minden </a:t>
+            </a:r>
+            <a:r>
+              <a:rPr lang="en-GB" dirty="0" err="1"/>
+              <a:t>személyes</a:t>
+            </a:r>
+            <a:r>
+              <a:rPr lang="en-GB" dirty="0"/>
+              <a:t> </a:t>
+            </a:r>
+            <a:r>
+              <a:rPr lang="en-GB" dirty="0" err="1"/>
+              <a:t>adat</a:t>
+            </a:r>
+            <a:r>
+              <a:rPr lang="en-GB" dirty="0"/>
+              <a:t> </a:t>
+            </a:r>
+            <a:r>
+              <a:rPr lang="en-GB" dirty="0" err="1"/>
+              <a:t>titkosítva</a:t>
+            </a:r>
+            <a:r>
+              <a:rPr lang="en-GB" dirty="0"/>
+              <a:t> van </a:t>
+            </a:r>
+            <a:r>
+              <a:rPr lang="en-GB" dirty="0" err="1"/>
+              <a:t>tárolva</a:t>
+            </a:r>
+            <a:endParaRPr lang="en-GB" dirty="0"/>
+          </a:p>
+          <a:p>
+            <a:r>
+              <a:rPr lang="en-GB" dirty="0" err="1"/>
+              <a:t>Bejelentkezés</a:t>
+            </a:r>
+            <a:r>
+              <a:rPr lang="en-GB" dirty="0"/>
+              <a:t> </a:t>
+            </a:r>
+            <a:r>
+              <a:rPr lang="en-GB" dirty="0" err="1"/>
+              <a:t>előre</a:t>
+            </a:r>
+            <a:r>
+              <a:rPr lang="en-GB" dirty="0"/>
+              <a:t> </a:t>
+            </a:r>
+            <a:r>
+              <a:rPr lang="en-GB" i="1" dirty="0"/>
+              <a:t>“</a:t>
+            </a:r>
+            <a:r>
+              <a:rPr lang="en-GB" i="1" dirty="0" err="1"/>
+              <a:t>sósozott</a:t>
+            </a:r>
+            <a:r>
+              <a:rPr lang="en-GB" i="1" dirty="0"/>
+              <a:t>” </a:t>
+            </a:r>
+            <a:r>
+              <a:rPr lang="en-GB" dirty="0" err="1"/>
+              <a:t>adatokkal</a:t>
+            </a:r>
+            <a:r>
+              <a:rPr lang="en-GB" dirty="0"/>
+              <a:t> </a:t>
+            </a:r>
+            <a:r>
+              <a:rPr lang="en-GB" dirty="0" err="1"/>
+              <a:t>keresi</a:t>
+            </a:r>
+            <a:r>
+              <a:rPr lang="en-GB" dirty="0"/>
+              <a:t> a </a:t>
+            </a:r>
+            <a:r>
+              <a:rPr lang="en-GB" dirty="0" err="1"/>
+              <a:t>felhasználót</a:t>
+            </a:r>
+            <a:endParaRPr lang="en-GB" dirty="0"/>
+          </a:p>
+          <a:p>
+            <a:r>
+              <a:rPr lang="en-GB" dirty="0"/>
+              <a:t>A </a:t>
+            </a:r>
+            <a:r>
+              <a:rPr lang="en-GB" dirty="0" err="1"/>
+              <a:t>jelszavon</a:t>
+            </a:r>
+            <a:r>
+              <a:rPr lang="en-GB" dirty="0"/>
+              <a:t> </a:t>
+            </a:r>
+            <a:r>
+              <a:rPr lang="en-GB" dirty="0" err="1"/>
+              <a:t>kívül</a:t>
+            </a:r>
+            <a:r>
+              <a:rPr lang="en-GB" dirty="0"/>
+              <a:t> </a:t>
+            </a:r>
+            <a:r>
+              <a:rPr lang="en-GB" dirty="0" err="1"/>
+              <a:t>minden</a:t>
+            </a:r>
+            <a:r>
+              <a:rPr lang="en-GB" dirty="0"/>
+              <a:t> </a:t>
+            </a:r>
+            <a:r>
+              <a:rPr lang="en-GB" dirty="0" err="1"/>
+              <a:t>adat</a:t>
+            </a:r>
+            <a:r>
+              <a:rPr lang="en-GB" dirty="0"/>
+              <a:t> </a:t>
+            </a:r>
+            <a:r>
+              <a:rPr lang="en-GB" u="sng" dirty="0" err="1"/>
+              <a:t>visszafejthetően</a:t>
+            </a:r>
+            <a:r>
+              <a:rPr lang="en-GB" u="sng" dirty="0"/>
+              <a:t> </a:t>
+            </a:r>
+            <a:r>
+              <a:rPr lang="en-GB" u="sng" dirty="0" err="1"/>
+              <a:t>titkosít</a:t>
+            </a:r>
+            <a:r>
+              <a:rPr lang="en-GB" dirty="0" err="1"/>
+              <a:t>va</a:t>
+            </a:r>
+            <a:r>
+              <a:rPr lang="en-GB" dirty="0"/>
+              <a:t> van, pl email, </a:t>
+            </a:r>
+            <a:r>
+              <a:rPr lang="en-GB" dirty="0" err="1"/>
+              <a:t>azért</a:t>
+            </a:r>
+            <a:r>
+              <a:rPr lang="en-GB" dirty="0"/>
+              <a:t> </a:t>
+            </a:r>
+            <a:r>
+              <a:rPr lang="en-GB" dirty="0" err="1"/>
+              <a:t>hogy</a:t>
+            </a:r>
+            <a:r>
+              <a:rPr lang="en-GB" dirty="0"/>
+              <a:t> a </a:t>
+            </a:r>
+            <a:r>
+              <a:rPr lang="en-GB" dirty="0" err="1"/>
+              <a:t>profil</a:t>
+            </a:r>
+            <a:r>
+              <a:rPr lang="en-GB" dirty="0"/>
+              <a:t> </a:t>
+            </a:r>
+            <a:r>
+              <a:rPr lang="en-GB" dirty="0" err="1"/>
+              <a:t>oldalon</a:t>
+            </a:r>
+            <a:r>
+              <a:rPr lang="en-GB" dirty="0"/>
+              <a:t> </a:t>
+            </a:r>
+            <a:r>
+              <a:rPr lang="en-GB" dirty="0" err="1"/>
+              <a:t>megjelenítődjön</a:t>
+            </a:r>
+            <a:endParaRPr lang="hu-HU" dirty="0"/>
+          </a:p>
+        </p:txBody>
+      </p:sp>
+      <p:pic>
+        <p:nvPicPr>
+          <p:cNvPr id="7" name="Kép 6">
+            <a:extLst>
+              <a:ext uri="{FF2B5EF4-FFF2-40B4-BE49-F238E27FC236}">
+                <a16:creationId xmlns:a16="http://schemas.microsoft.com/office/drawing/2014/main" id="{C2519F02-CA47-C966-2D6F-AF426A59BA1B}"/>
+              </a:ext>
+            </a:extLst>
+          </p:cNvPr>
+          <p:cNvPicPr>
+            <a:picLocks noChangeAspect="1"/>
+          </p:cNvPicPr>
+          <p:nvPr/>
+        </p:nvPicPr>
+        <p:blipFill>
+          <a:blip r:embed="rId2"/>
+          <a:stretch>
+            <a:fillRect/>
+          </a:stretch>
+        </p:blipFill>
+        <p:spPr>
+          <a:xfrm>
+            <a:off x="3905250" y="3986213"/>
+            <a:ext cx="7448550" cy="2190750"/>
+          </a:xfrm>
+          <a:prstGeom prst="rect">
+            <a:avLst/>
+          </a:prstGeom>
+        </p:spPr>
+      </p:pic>
+    </p:spTree>
+    <p:extLst>
+      <p:ext uri="{BB962C8B-B14F-4D97-AF65-F5344CB8AC3E}">
+        <p14:creationId xmlns:p14="http://schemas.microsoft.com/office/powerpoint/2010/main" val="229062480"/>
+      </p:ext>
+    </p:extLst>
+  </p:cSld>
+  <p:clrMapOvr>
+    <a:masterClrMapping/>
+  </p:clrMapOvr>
+</p:sld>
+</file>
+
+<file path=ppt/slides/slide15.xml><?xml version="1.0" encoding="utf-8"?>
+<p:sld xmlns:a="http://schemas.openxmlformats.org/drawingml/2006/main" xmlns:r="http://schemas.openxmlformats.org/officeDocument/2006/relationships" xmlns:p="http://schemas.openxmlformats.org/presentationml/2006/main">
+  <p:cSld>
+    <p:spTree>
+      <p:nvGrpSpPr>
+        <p:cNvPr id="1" name=""/>
+        <p:cNvGrpSpPr/>
+        <p:nvPr/>
+      </p:nvGrpSpPr>
+      <p:grpSpPr>
+        <a:xfrm>
+          <a:off x="0" y="0"/>
+          <a:ext cx="0" cy="0"/>
+          <a:chOff x="0" y="0"/>
+          <a:chExt cx="0" cy="0"/>
+        </a:xfrm>
+      </p:grpSpPr>
+      <p:sp>
+        <p:nvSpPr>
+          <p:cNvPr id="2" name="Cím 1">
+            <a:extLst>
+              <a:ext uri="{FF2B5EF4-FFF2-40B4-BE49-F238E27FC236}">
+                <a16:creationId xmlns:a16="http://schemas.microsoft.com/office/drawing/2014/main" id="{50B58FDF-5FF9-B59E-1ABA-0D5415EEF67F}"/>
+              </a:ext>
+            </a:extLst>
+          </p:cNvPr>
+          <p:cNvSpPr>
+            <a:spLocks noGrp="1"/>
+          </p:cNvSpPr>
+          <p:nvPr>
+            <p:ph type="title"/>
+          </p:nvPr>
+        </p:nvSpPr>
+        <p:spPr/>
+        <p:txBody>
+          <a:bodyPr/>
+          <a:lstStyle/>
+          <a:p>
+            <a:r>
+              <a:rPr lang="en-GB" dirty="0" err="1"/>
+              <a:t>Biztonság</a:t>
+            </a:r>
+            <a:endParaRPr lang="hu-HU" dirty="0"/>
+          </a:p>
+        </p:txBody>
+      </p:sp>
+      <p:sp>
+        <p:nvSpPr>
+          <p:cNvPr id="3" name="Tartalom helye 2">
+            <a:extLst>
+              <a:ext uri="{FF2B5EF4-FFF2-40B4-BE49-F238E27FC236}">
+                <a16:creationId xmlns:a16="http://schemas.microsoft.com/office/drawing/2014/main" id="{CDF43483-0AC2-FDC8-466D-9A6C4176AE02}"/>
+              </a:ext>
+            </a:extLst>
+          </p:cNvPr>
+          <p:cNvSpPr>
+            <a:spLocks noGrp="1"/>
+          </p:cNvSpPr>
+          <p:nvPr>
+            <p:ph idx="1"/>
+          </p:nvPr>
+        </p:nvSpPr>
+        <p:spPr>
+          <a:solidFill>
+            <a:srgbClr val="FFF3F3"/>
+          </a:solidFill>
+          <a:ln>
+            <a:noFill/>
+          </a:ln>
+          <a:effectLst>
+            <a:outerShdw blurRad="149987" dist="250190" dir="8460000" algn="ctr">
+              <a:srgbClr val="000000">
+                <a:alpha val="28000"/>
+              </a:srgbClr>
+            </a:outerShdw>
+          </a:effectLst>
+        </p:spPr>
+        <p:txBody>
+          <a:bodyPr/>
+          <a:lstStyle/>
+          <a:p>
+            <a:r>
+              <a:rPr lang="hu-HU" dirty="0"/>
+              <a:t>Az </a:t>
+            </a:r>
+            <a:r>
+              <a:rPr lang="hu-HU" dirty="0" err="1"/>
+              <a:t>access</a:t>
+            </a:r>
+            <a:r>
+              <a:rPr lang="hu-HU" dirty="0"/>
+              <a:t> </a:t>
+            </a:r>
+            <a:r>
+              <a:rPr lang="hu-HU" dirty="0" err="1"/>
+              <a:t>token</a:t>
+            </a:r>
+            <a:r>
+              <a:rPr lang="hu-HU" dirty="0"/>
+              <a:t> egy rövid távú „belépőkártya” a védett erőforrásokhoz, a </a:t>
+            </a:r>
+            <a:r>
+              <a:rPr lang="hu-HU" dirty="0" err="1"/>
+              <a:t>refresh</a:t>
+            </a:r>
+            <a:r>
+              <a:rPr lang="hu-HU" dirty="0"/>
+              <a:t> </a:t>
+            </a:r>
+            <a:r>
+              <a:rPr lang="hu-HU" dirty="0" err="1"/>
+              <a:t>token</a:t>
+            </a:r>
+            <a:r>
+              <a:rPr lang="hu-HU" dirty="0"/>
+              <a:t> pedig arra szolgál, hogy lejáratkor új </a:t>
+            </a:r>
+            <a:r>
+              <a:rPr lang="hu-HU" dirty="0" err="1"/>
+              <a:t>access</a:t>
+            </a:r>
+            <a:r>
+              <a:rPr lang="hu-HU" dirty="0"/>
+              <a:t> </a:t>
+            </a:r>
+            <a:r>
+              <a:rPr lang="hu-HU" dirty="0" err="1"/>
+              <a:t>tokent</a:t>
+            </a:r>
+            <a:r>
+              <a:rPr lang="hu-HU" dirty="0"/>
+              <a:t> igényeljünk vele anélkül, hogy a felhasználónak újra be kellene jelentkeznie.</a:t>
+            </a:r>
+            <a:endParaRPr lang="en-GB" dirty="0"/>
+          </a:p>
+          <a:p>
+            <a:r>
+              <a:rPr lang="en-GB" dirty="0"/>
+              <a:t>Email </a:t>
+            </a:r>
+            <a:r>
+              <a:rPr lang="en-GB" dirty="0" err="1"/>
+              <a:t>cím</a:t>
+            </a:r>
+            <a:r>
+              <a:rPr lang="en-GB" dirty="0"/>
+              <a:t> </a:t>
+            </a:r>
+            <a:r>
+              <a:rPr lang="en-GB" dirty="0" err="1"/>
+              <a:t>megerősítése</a:t>
+            </a:r>
+            <a:r>
+              <a:rPr lang="en-GB" dirty="0"/>
+              <a:t> </a:t>
+            </a:r>
+            <a:r>
+              <a:rPr lang="en-GB" dirty="0" err="1"/>
+              <a:t>első</a:t>
+            </a:r>
+            <a:r>
+              <a:rPr lang="en-GB" dirty="0"/>
+              <a:t> </a:t>
+            </a:r>
+            <a:r>
+              <a:rPr lang="en-GB" dirty="0" err="1"/>
+              <a:t>bejelentkezés</a:t>
+            </a:r>
+            <a:r>
+              <a:rPr lang="en-GB" dirty="0"/>
+              <a:t> </a:t>
+            </a:r>
+            <a:r>
+              <a:rPr lang="en-GB" dirty="0" err="1"/>
+              <a:t>előtt</a:t>
+            </a:r>
+            <a:r>
+              <a:rPr lang="en-GB" dirty="0"/>
+              <a:t>!</a:t>
+            </a:r>
+          </a:p>
+          <a:p>
+            <a:r>
+              <a:rPr lang="en-GB" dirty="0" err="1"/>
+              <a:t>Elfelejtettem</a:t>
+            </a:r>
+            <a:r>
+              <a:rPr lang="en-GB" dirty="0"/>
+              <a:t> a </a:t>
+            </a:r>
+            <a:r>
+              <a:rPr lang="en-GB" dirty="0" err="1"/>
+              <a:t>jelszavamat</a:t>
+            </a:r>
+            <a:r>
+              <a:rPr lang="en-GB" dirty="0"/>
+              <a:t>: </a:t>
+            </a:r>
+            <a:r>
+              <a:rPr lang="en-GB" dirty="0" err="1"/>
+              <a:t>Új</a:t>
+            </a:r>
+            <a:r>
+              <a:rPr lang="en-GB" dirty="0"/>
+              <a:t> </a:t>
+            </a:r>
+            <a:r>
+              <a:rPr lang="en-GB" dirty="0" err="1"/>
+              <a:t>jelszó</a:t>
+            </a:r>
+            <a:r>
+              <a:rPr lang="en-GB" dirty="0"/>
+              <a:t> </a:t>
+            </a:r>
+            <a:r>
+              <a:rPr lang="en-GB" dirty="0" err="1"/>
+              <a:t>kérése</a:t>
+            </a:r>
+            <a:endParaRPr lang="en-GB" dirty="0"/>
+          </a:p>
+        </p:txBody>
+      </p:sp>
+    </p:spTree>
+    <p:extLst>
+      <p:ext uri="{BB962C8B-B14F-4D97-AF65-F5344CB8AC3E}">
+        <p14:creationId xmlns:p14="http://schemas.microsoft.com/office/powerpoint/2010/main" val="964557571"/>
+      </p:ext>
+    </p:extLst>
+  </p:cSld>
+  <p:clrMapOvr>
+    <a:masterClrMapping/>
+  </p:clrMapOvr>
+</p:sld>
+</file>
+
+<file path=ppt/slides/slide16.xml><?xml version="1.0" encoding="utf-8"?>
+<p:sld xmlns:a="http://schemas.openxmlformats.org/drawingml/2006/main" xmlns:r="http://schemas.openxmlformats.org/officeDocument/2006/relationships" xmlns:p="http://schemas.openxmlformats.org/presentationml/2006/main">
+  <p:cSld>
+    <p:spTree>
+      <p:nvGrpSpPr>
+        <p:cNvPr id="1" name=""/>
+        <p:cNvGrpSpPr/>
+        <p:nvPr/>
+      </p:nvGrpSpPr>
+      <p:grpSpPr>
+        <a:xfrm>
+          <a:off x="0" y="0"/>
+          <a:ext cx="0" cy="0"/>
+          <a:chOff x="0" y="0"/>
+          <a:chExt cx="0" cy="0"/>
+        </a:xfrm>
+      </p:grpSpPr>
+      <p:sp>
+        <p:nvSpPr>
+          <p:cNvPr id="2" name="Cím 1">
+            <a:extLst>
+              <a:ext uri="{FF2B5EF4-FFF2-40B4-BE49-F238E27FC236}">
+                <a16:creationId xmlns:a16="http://schemas.microsoft.com/office/drawing/2014/main" id="{50B58FDF-5FF9-B59E-1ABA-0D5415EEF67F}"/>
+              </a:ext>
+            </a:extLst>
+          </p:cNvPr>
+          <p:cNvSpPr>
+            <a:spLocks noGrp="1"/>
+          </p:cNvSpPr>
+          <p:nvPr>
+            <p:ph type="title"/>
+          </p:nvPr>
+        </p:nvSpPr>
+        <p:spPr/>
+        <p:txBody>
+          <a:bodyPr/>
+          <a:lstStyle/>
+          <a:p>
+            <a:r>
+              <a:rPr lang="en-GB" dirty="0" err="1"/>
+              <a:t>Képek</a:t>
+            </a:r>
+            <a:r>
+              <a:rPr lang="en-GB" dirty="0"/>
+              <a:t> </a:t>
+            </a:r>
+            <a:r>
+              <a:rPr lang="en-GB" dirty="0" err="1"/>
+              <a:t>kiszolgálása</a:t>
+            </a:r>
+            <a:endParaRPr lang="hu-HU" dirty="0"/>
+          </a:p>
+        </p:txBody>
+      </p:sp>
+      <p:sp>
+        <p:nvSpPr>
+          <p:cNvPr id="3" name="Tartalom helye 2">
+            <a:extLst>
+              <a:ext uri="{FF2B5EF4-FFF2-40B4-BE49-F238E27FC236}">
+                <a16:creationId xmlns:a16="http://schemas.microsoft.com/office/drawing/2014/main" id="{CDF43483-0AC2-FDC8-466D-9A6C4176AE02}"/>
+              </a:ext>
+            </a:extLst>
+          </p:cNvPr>
+          <p:cNvSpPr>
+            <a:spLocks noGrp="1"/>
+          </p:cNvSpPr>
+          <p:nvPr>
+            <p:ph idx="1"/>
+          </p:nvPr>
+        </p:nvSpPr>
+        <p:spPr>
+          <a:solidFill>
+            <a:srgbClr val="FFF3F3"/>
+          </a:solidFill>
+          <a:ln>
+            <a:noFill/>
+          </a:ln>
+          <a:effectLst>
+            <a:outerShdw blurRad="149987" dist="250190" dir="8460000" algn="ctr">
+              <a:srgbClr val="000000">
+                <a:alpha val="28000"/>
+              </a:srgbClr>
+            </a:outerShdw>
+          </a:effectLst>
+        </p:spPr>
+        <p:txBody>
+          <a:bodyPr/>
+          <a:lstStyle/>
+          <a:p>
+            <a:r>
+              <a:rPr lang="en-GB" dirty="0" err="1"/>
+              <a:t>Saját</a:t>
+            </a:r>
+            <a:r>
+              <a:rPr lang="en-GB" dirty="0"/>
+              <a:t> discord bot </a:t>
+            </a:r>
+            <a:r>
+              <a:rPr lang="en-GB" dirty="0" err="1"/>
+              <a:t>biztosítja</a:t>
+            </a:r>
+            <a:r>
+              <a:rPr lang="en-GB" dirty="0"/>
+              <a:t> a </a:t>
+            </a:r>
+            <a:r>
+              <a:rPr lang="en-GB" dirty="0" err="1"/>
+              <a:t>képeket</a:t>
+            </a:r>
+            <a:endParaRPr lang="en-GB" dirty="0"/>
+          </a:p>
+        </p:txBody>
+      </p:sp>
+    </p:spTree>
+    <p:extLst>
+      <p:ext uri="{BB962C8B-B14F-4D97-AF65-F5344CB8AC3E}">
+        <p14:creationId xmlns:p14="http://schemas.microsoft.com/office/powerpoint/2010/main" val="2606340618"/>
+      </p:ext>
+    </p:extLst>
+  </p:cSld>
+  <p:clrMapOvr>
+    <a:masterClrMapping/>
+  </p:clrMapOvr>
+</p:sld>
+</file>
+
+<file path=ppt/slides/slide17.xml><?xml version="1.0" encoding="utf-8"?>
+<p:sld xmlns:a="http://schemas.openxmlformats.org/drawingml/2006/main" xmlns:r="http://schemas.openxmlformats.org/officeDocument/2006/relationships" xmlns:p="http://schemas.openxmlformats.org/presentationml/2006/main">
+  <p:cSld>
+    <p:spTree>
+      <p:nvGrpSpPr>
+        <p:cNvPr id="1" name=""/>
+        <p:cNvGrpSpPr/>
+        <p:nvPr/>
+      </p:nvGrpSpPr>
+      <p:grpSpPr>
+        <a:xfrm>
+          <a:off x="0" y="0"/>
+          <a:ext cx="0" cy="0"/>
+          <a:chOff x="0" y="0"/>
+          <a:chExt cx="0" cy="0"/>
+        </a:xfrm>
+      </p:grpSpPr>
+      <p:sp>
+        <p:nvSpPr>
+          <p:cNvPr id="2" name="Cím 1">
+            <a:extLst>
+              <a:ext uri="{FF2B5EF4-FFF2-40B4-BE49-F238E27FC236}">
+                <a16:creationId xmlns:a16="http://schemas.microsoft.com/office/drawing/2014/main" id="{50B58FDF-5FF9-B59E-1ABA-0D5415EEF67F}"/>
+              </a:ext>
+            </a:extLst>
+          </p:cNvPr>
+          <p:cNvSpPr>
+            <a:spLocks noGrp="1"/>
+          </p:cNvSpPr>
+          <p:nvPr>
+            <p:ph type="title"/>
+          </p:nvPr>
+        </p:nvSpPr>
+        <p:spPr/>
+        <p:txBody>
+          <a:bodyPr/>
+          <a:lstStyle/>
+          <a:p>
+            <a:r>
+              <a:rPr lang="en-GB" dirty="0" err="1"/>
+              <a:t>Futtatás</a:t>
+            </a:r>
+            <a:r>
+              <a:rPr lang="en-GB" dirty="0"/>
+              <a:t> </a:t>
+            </a:r>
+            <a:r>
+              <a:rPr lang="en-GB" dirty="0" err="1"/>
+              <a:t>akárhol</a:t>
+            </a:r>
+            <a:endParaRPr lang="hu-HU" dirty="0"/>
+          </a:p>
+        </p:txBody>
+      </p:sp>
+      <p:sp>
+        <p:nvSpPr>
+          <p:cNvPr id="3" name="Tartalom helye 2">
+            <a:extLst>
+              <a:ext uri="{FF2B5EF4-FFF2-40B4-BE49-F238E27FC236}">
+                <a16:creationId xmlns:a16="http://schemas.microsoft.com/office/drawing/2014/main" id="{CDF43483-0AC2-FDC8-466D-9A6C4176AE02}"/>
+              </a:ext>
+            </a:extLst>
+          </p:cNvPr>
+          <p:cNvSpPr>
+            <a:spLocks noGrp="1"/>
+          </p:cNvSpPr>
+          <p:nvPr>
+            <p:ph idx="1"/>
+          </p:nvPr>
+        </p:nvSpPr>
+        <p:spPr>
+          <a:solidFill>
+            <a:srgbClr val="FFF3F3"/>
+          </a:solidFill>
+          <a:ln>
+            <a:noFill/>
+          </a:ln>
+          <a:effectLst>
+            <a:outerShdw blurRad="149987" dist="250190" dir="8460000" algn="ctr">
+              <a:srgbClr val="000000">
+                <a:alpha val="28000"/>
+              </a:srgbClr>
+            </a:outerShdw>
+          </a:effectLst>
+        </p:spPr>
+        <p:txBody>
+          <a:bodyPr/>
+          <a:lstStyle/>
+          <a:p>
+            <a:r>
+              <a:rPr lang="en-GB" dirty="0"/>
+              <a:t>A </a:t>
+            </a:r>
+            <a:r>
+              <a:rPr lang="en-GB" dirty="0" err="1"/>
+              <a:t>Repoban</a:t>
+            </a:r>
+            <a:r>
+              <a:rPr lang="en-GB" dirty="0"/>
+              <a:t> </a:t>
+            </a:r>
+            <a:r>
+              <a:rPr lang="en-GB" dirty="0" err="1"/>
+              <a:t>megtalálható</a:t>
+            </a:r>
+            <a:r>
+              <a:rPr lang="en-GB" dirty="0"/>
+              <a:t> </a:t>
+            </a:r>
+            <a:r>
+              <a:rPr lang="en-GB" dirty="0" err="1"/>
+              <a:t>egy</a:t>
+            </a:r>
+            <a:r>
+              <a:rPr lang="en-GB" dirty="0"/>
+              <a:t> “docker-</a:t>
+            </a:r>
+            <a:r>
+              <a:rPr lang="en-GB" dirty="0" err="1"/>
+              <a:t>compose.yaml</a:t>
+            </a:r>
+            <a:r>
+              <a:rPr lang="en-GB" dirty="0"/>
+              <a:t>” </a:t>
+            </a:r>
+            <a:r>
+              <a:rPr lang="en-GB" dirty="0" err="1"/>
+              <a:t>fájl</a:t>
+            </a:r>
+            <a:r>
+              <a:rPr lang="en-GB" dirty="0"/>
+              <a:t>, </a:t>
+            </a:r>
+            <a:r>
+              <a:rPr lang="en-GB" dirty="0" err="1"/>
+              <a:t>ami</a:t>
+            </a:r>
+            <a:r>
+              <a:rPr lang="en-GB" dirty="0"/>
+              <a:t> </a:t>
+            </a:r>
+            <a:r>
+              <a:rPr lang="en-GB" dirty="0" err="1"/>
+              <a:t>lehetővé</a:t>
+            </a:r>
+            <a:r>
+              <a:rPr lang="en-GB" dirty="0"/>
+              <a:t> </a:t>
+            </a:r>
+            <a:r>
+              <a:rPr lang="en-GB" dirty="0" err="1"/>
+              <a:t>teszi</a:t>
+            </a:r>
+            <a:r>
+              <a:rPr lang="en-GB" dirty="0"/>
+              <a:t> </a:t>
+            </a:r>
+            <a:r>
+              <a:rPr lang="en-GB" dirty="0" err="1"/>
+              <a:t>az</a:t>
+            </a:r>
+            <a:r>
+              <a:rPr lang="en-GB" dirty="0"/>
+              <a:t> </a:t>
+            </a:r>
+            <a:r>
+              <a:rPr lang="en-GB" dirty="0" err="1"/>
+              <a:t>oldal</a:t>
+            </a:r>
+            <a:r>
+              <a:rPr lang="en-GB" dirty="0"/>
+              <a:t> </a:t>
+            </a:r>
+            <a:r>
+              <a:rPr lang="en-GB" dirty="0" err="1"/>
+              <a:t>futtatását</a:t>
+            </a:r>
+            <a:r>
+              <a:rPr lang="en-GB" dirty="0"/>
+              <a:t> </a:t>
+            </a:r>
+            <a:r>
+              <a:rPr lang="en-GB" dirty="0" err="1"/>
+              <a:t>akárhol</a:t>
+            </a:r>
+            <a:r>
+              <a:rPr lang="en-GB" dirty="0"/>
+              <a:t> </a:t>
+            </a:r>
+            <a:r>
+              <a:rPr lang="en-GB" dirty="0" err="1"/>
+              <a:t>csak</a:t>
+            </a:r>
+            <a:r>
+              <a:rPr lang="en-GB" dirty="0"/>
+              <a:t> </a:t>
+            </a:r>
+            <a:r>
+              <a:rPr lang="en-GB" u="sng" dirty="0" err="1">
+                <a:solidFill>
+                  <a:srgbClr val="8D2CA5"/>
+                </a:solidFill>
+              </a:rPr>
+              <a:t>Podmant</a:t>
+            </a:r>
+            <a:r>
+              <a:rPr lang="en-GB" dirty="0"/>
+              <a:t> </a:t>
+            </a:r>
+            <a:br>
+              <a:rPr lang="en-GB" dirty="0"/>
+            </a:br>
+            <a:r>
+              <a:rPr lang="en-GB" dirty="0"/>
+              <a:t>/ </a:t>
+            </a:r>
+            <a:r>
+              <a:rPr lang="en-GB" u="sng" dirty="0" err="1">
+                <a:solidFill>
+                  <a:srgbClr val="2396EE"/>
+                </a:solidFill>
+              </a:rPr>
+              <a:t>Dockert</a:t>
+            </a:r>
+            <a:r>
+              <a:rPr lang="en-GB" dirty="0"/>
+              <a:t> </a:t>
+            </a:r>
+            <a:r>
+              <a:rPr lang="en-GB" dirty="0" err="1"/>
+              <a:t>kell</a:t>
+            </a:r>
+            <a:r>
+              <a:rPr lang="en-GB" dirty="0"/>
+              <a:t> </a:t>
+            </a:r>
+            <a:r>
+              <a:rPr lang="en-GB" dirty="0" err="1"/>
+              <a:t>letölteni</a:t>
+            </a:r>
+            <a:r>
+              <a:rPr lang="en-GB" dirty="0"/>
+              <a:t> a </a:t>
+            </a:r>
+            <a:r>
+              <a:rPr lang="en-GB" dirty="0" err="1"/>
+              <a:t>gépre</a:t>
+            </a:r>
+            <a:endParaRPr lang="en-GB" dirty="0"/>
+          </a:p>
+          <a:p>
+            <a:r>
+              <a:rPr lang="en-GB" dirty="0"/>
+              <a:t>A backend </a:t>
+            </a:r>
+            <a:r>
+              <a:rPr lang="en-GB" dirty="0" err="1"/>
+              <a:t>mappában</a:t>
+            </a:r>
+            <a:r>
+              <a:rPr lang="en-GB" dirty="0"/>
+              <a:t> </a:t>
+            </a:r>
+            <a:r>
+              <a:rPr lang="en-GB" dirty="0" err="1"/>
+              <a:t>található</a:t>
+            </a:r>
+            <a:r>
+              <a:rPr lang="en-GB" dirty="0"/>
+              <a:t> </a:t>
+            </a:r>
+            <a:r>
+              <a:rPr lang="en-GB" dirty="0" err="1"/>
+              <a:t>egy</a:t>
+            </a:r>
+            <a:r>
+              <a:rPr lang="en-GB" dirty="0"/>
+              <a:t> “</a:t>
+            </a:r>
+            <a:r>
+              <a:rPr lang="en-GB" dirty="0" err="1"/>
+              <a:t>configEXAMPLE.json</a:t>
+            </a:r>
+            <a:r>
+              <a:rPr lang="en-GB" dirty="0"/>
+              <a:t>” a </a:t>
+            </a:r>
+            <a:r>
+              <a:rPr lang="en-GB" dirty="0" err="1"/>
+              <a:t>környezeti</a:t>
+            </a:r>
+            <a:r>
+              <a:rPr lang="en-GB" dirty="0"/>
+              <a:t> </a:t>
+            </a:r>
+            <a:r>
+              <a:rPr lang="en-GB" dirty="0" err="1"/>
+              <a:t>változók</a:t>
+            </a:r>
+            <a:r>
+              <a:rPr lang="en-GB" dirty="0"/>
+              <a:t> </a:t>
+            </a:r>
+            <a:r>
+              <a:rPr lang="en-GB" dirty="0" err="1"/>
+              <a:t>beállításához</a:t>
+            </a:r>
+            <a:r>
+              <a:rPr lang="en-GB" dirty="0"/>
+              <a:t> (</a:t>
+            </a:r>
+            <a:r>
+              <a:rPr lang="en-GB" dirty="0" err="1"/>
+              <a:t>Módosítások</a:t>
+            </a:r>
+            <a:r>
+              <a:rPr lang="en-GB" dirty="0"/>
+              <a:t> </a:t>
+            </a:r>
+            <a:r>
+              <a:rPr lang="en-GB" dirty="0" err="1"/>
+              <a:t>szügségesek</a:t>
+            </a:r>
+            <a:r>
+              <a:rPr lang="en-GB" dirty="0"/>
+              <a:t>)</a:t>
+            </a:r>
+          </a:p>
+        </p:txBody>
+      </p:sp>
+      <p:pic>
+        <p:nvPicPr>
+          <p:cNvPr id="1028" name="Picture 4" descr="Docker logo thumbnail transparent PNG - StickPNG">
+            <a:extLst>
+              <a:ext uri="{FF2B5EF4-FFF2-40B4-BE49-F238E27FC236}">
+                <a16:creationId xmlns:a16="http://schemas.microsoft.com/office/drawing/2014/main" id="{73FC534D-64C9-64A5-C5FE-1FE49B512128}"/>
+              </a:ext>
+            </a:extLst>
+          </p:cNvPr>
+          <p:cNvPicPr>
+            <a:picLocks noChangeAspect="1" noChangeArrowheads="1"/>
+          </p:cNvPicPr>
+          <p:nvPr/>
+        </p:nvPicPr>
+        <p:blipFill>
+          <a:blip r:embed="rId2">
+            <a:extLst>
+              <a:ext uri="{28A0092B-C50C-407E-A947-70E740481C1C}">
+                <a14:useLocalDpi xmlns:a14="http://schemas.microsoft.com/office/drawing/2010/main" val="0"/>
+              </a:ext>
+            </a:extLst>
+          </a:blip>
+          <a:srcRect/>
+          <a:stretch>
+            <a:fillRect/>
+          </a:stretch>
+        </p:blipFill>
+        <p:spPr bwMode="auto">
+          <a:xfrm>
+            <a:off x="10430415" y="2640810"/>
+            <a:ext cx="516464" cy="516464"/>
+          </a:xfrm>
+          <a:prstGeom prst="rect">
+            <a:avLst/>
+          </a:prstGeom>
+          <a:noFill/>
+          <a:extLst>
+            <a:ext uri="{909E8E84-426E-40DD-AFC4-6F175D3DCCD1}">
+              <a14:hiddenFill xmlns:a14="http://schemas.microsoft.com/office/drawing/2010/main">
+                <a:solidFill>
+                  <a:srgbClr val="FFFFFF"/>
+                </a:solidFill>
+              </a14:hiddenFill>
+            </a:ext>
+          </a:extLst>
+        </p:spPr>
+      </p:pic>
+      <p:pic>
+        <p:nvPicPr>
+          <p:cNvPr id="1032" name="Picture 8" descr="Linux Shell 实现一键部署podman_linux安装podman-CSDN博客">
+            <a:extLst>
+              <a:ext uri="{FF2B5EF4-FFF2-40B4-BE49-F238E27FC236}">
+                <a16:creationId xmlns:a16="http://schemas.microsoft.com/office/drawing/2014/main" id="{07AA90F0-CC3D-62B3-E62C-F50493F08EE7}"/>
+              </a:ext>
+            </a:extLst>
+          </p:cNvPr>
+          <p:cNvPicPr>
+            <a:picLocks noChangeAspect="1" noChangeArrowheads="1"/>
+          </p:cNvPicPr>
+          <p:nvPr/>
+        </p:nvPicPr>
+        <p:blipFill>
+          <a:blip r:embed="rId3">
+            <a:extLst>
+              <a:ext uri="{28A0092B-C50C-407E-A947-70E740481C1C}">
+                <a14:useLocalDpi xmlns:a14="http://schemas.microsoft.com/office/drawing/2010/main" val="0"/>
+              </a:ext>
+            </a:extLst>
+          </a:blip>
+          <a:srcRect/>
+          <a:stretch>
+            <a:fillRect/>
+          </a:stretch>
+        </p:blipFill>
+        <p:spPr bwMode="auto">
+          <a:xfrm>
+            <a:off x="10430415" y="2248701"/>
+            <a:ext cx="516464" cy="392899"/>
+          </a:xfrm>
+          <a:prstGeom prst="rect">
+            <a:avLst/>
+          </a:prstGeom>
+          <a:noFill/>
+          <a:extLst>
+            <a:ext uri="{909E8E84-426E-40DD-AFC4-6F175D3DCCD1}">
+              <a14:hiddenFill xmlns:a14="http://schemas.microsoft.com/office/drawing/2010/main">
+                <a:solidFill>
+                  <a:srgbClr val="FFFFFF"/>
+                </a:solidFill>
+              </a14:hiddenFill>
+            </a:ext>
+          </a:extLst>
+        </p:spPr>
+      </p:pic>
+    </p:spTree>
+    <p:extLst>
+      <p:ext uri="{BB962C8B-B14F-4D97-AF65-F5344CB8AC3E}">
+        <p14:creationId xmlns:p14="http://schemas.microsoft.com/office/powerpoint/2010/main" val="191481300"/>
+      </p:ext>
+    </p:extLst>
+  </p:cSld>
+  <p:clrMapOvr>
+    <a:masterClrMapping/>
+  </p:clrMapOvr>
+</p:sld>
+</file>
+
+<file path=ppt/slides/slide18.xml><?xml version="1.0" encoding="utf-8"?>
+<p:sld xmlns:a="http://schemas.openxmlformats.org/drawingml/2006/main" xmlns:r="http://schemas.openxmlformats.org/officeDocument/2006/relationships" xmlns:p="http://schemas.openxmlformats.org/presentationml/2006/main">
+  <p:cSld>
+    <p:spTree>
+      <p:nvGrpSpPr>
+        <p:cNvPr id="1" name=""/>
+        <p:cNvGrpSpPr/>
+        <p:nvPr/>
+      </p:nvGrpSpPr>
+      <p:grpSpPr>
+        <a:xfrm>
+          <a:off x="0" y="0"/>
+          <a:ext cx="0" cy="0"/>
+          <a:chOff x="0" y="0"/>
+          <a:chExt cx="0" cy="0"/>
+        </a:xfrm>
+      </p:grpSpPr>
+      <p:sp>
+        <p:nvSpPr>
+          <p:cNvPr id="2" name="Cím 1">
+            <a:extLst>
+              <a:ext uri="{FF2B5EF4-FFF2-40B4-BE49-F238E27FC236}">
+                <a16:creationId xmlns:a16="http://schemas.microsoft.com/office/drawing/2014/main" id="{50B58FDF-5FF9-B59E-1ABA-0D5415EEF67F}"/>
+              </a:ext>
+            </a:extLst>
+          </p:cNvPr>
+          <p:cNvSpPr>
+            <a:spLocks noGrp="1"/>
+          </p:cNvSpPr>
+          <p:nvPr>
+            <p:ph type="title"/>
+          </p:nvPr>
+        </p:nvSpPr>
+        <p:spPr/>
+        <p:txBody>
+          <a:bodyPr/>
+          <a:lstStyle/>
+          <a:p>
+            <a:r>
+              <a:rPr lang="en-GB" dirty="0" err="1"/>
+              <a:t>Elérés</a:t>
+            </a:r>
+            <a:endParaRPr lang="hu-HU" dirty="0"/>
+          </a:p>
+        </p:txBody>
+      </p:sp>
+      <p:sp>
+        <p:nvSpPr>
+          <p:cNvPr id="3" name="Tartalom helye 2">
+            <a:extLst>
+              <a:ext uri="{FF2B5EF4-FFF2-40B4-BE49-F238E27FC236}">
+                <a16:creationId xmlns:a16="http://schemas.microsoft.com/office/drawing/2014/main" id="{CDF43483-0AC2-FDC8-466D-9A6C4176AE02}"/>
+              </a:ext>
+            </a:extLst>
+          </p:cNvPr>
+          <p:cNvSpPr>
+            <a:spLocks noGrp="1"/>
+          </p:cNvSpPr>
+          <p:nvPr>
+            <p:ph idx="1"/>
+          </p:nvPr>
+        </p:nvSpPr>
+        <p:spPr>
+          <a:solidFill>
+            <a:srgbClr val="FFF3F3"/>
+          </a:solidFill>
+          <a:ln>
+            <a:noFill/>
+          </a:ln>
+          <a:effectLst>
+            <a:outerShdw blurRad="149987" dist="250190" dir="8460000" algn="ctr">
+              <a:srgbClr val="000000">
+                <a:alpha val="28000"/>
+              </a:srgbClr>
+            </a:outerShdw>
+          </a:effectLst>
+        </p:spPr>
+        <p:txBody>
+          <a:bodyPr/>
+          <a:lstStyle/>
+          <a:p>
+            <a:r>
+              <a:rPr lang="en-GB" dirty="0"/>
+              <a:t>Az </a:t>
+            </a:r>
+            <a:r>
+              <a:rPr lang="en-GB" dirty="0" err="1"/>
+              <a:t>oldal</a:t>
+            </a:r>
+            <a:r>
+              <a:rPr lang="en-GB" dirty="0"/>
+              <a:t> </a:t>
+            </a:r>
+            <a:r>
+              <a:rPr lang="en-GB" b="1" u="sng" dirty="0">
+                <a:solidFill>
+                  <a:schemeClr val="accent6">
+                    <a:lumMod val="75000"/>
+                  </a:schemeClr>
+                </a:solidFill>
+              </a:rPr>
+              <a:t>oak.gerync.com</a:t>
+            </a:r>
+            <a:r>
+              <a:rPr lang="en-GB" dirty="0">
+                <a:solidFill>
+                  <a:schemeClr val="accent6">
+                    <a:lumMod val="75000"/>
+                  </a:schemeClr>
+                </a:solidFill>
+              </a:rPr>
+              <a:t> </a:t>
+            </a:r>
+            <a:r>
+              <a:rPr lang="en-GB" dirty="0"/>
+              <a:t>on </a:t>
+            </a:r>
+            <a:r>
+              <a:rPr lang="en-GB" dirty="0" err="1"/>
+              <a:t>érhető</a:t>
+            </a:r>
+            <a:r>
+              <a:rPr lang="en-GB" dirty="0"/>
+              <a:t> </a:t>
+            </a:r>
+            <a:r>
+              <a:rPr lang="en-GB" dirty="0" err="1"/>
+              <a:t>el</a:t>
+            </a:r>
+            <a:endParaRPr lang="en-GB" dirty="0"/>
+          </a:p>
+        </p:txBody>
+      </p:sp>
+    </p:spTree>
+    <p:extLst>
+      <p:ext uri="{BB962C8B-B14F-4D97-AF65-F5344CB8AC3E}">
+        <p14:creationId xmlns:p14="http://schemas.microsoft.com/office/powerpoint/2010/main" val="68091619"/>
+      </p:ext>
+    </p:extLst>
+  </p:cSld>
+  <p:clrMapOvr>
+    <a:masterClrMapping/>
+  </p:clrMapOvr>
+</p:sld>
+</file>
+
+<file path=ppt/slides/slide19.xml><?xml version="1.0" encoding="utf-8"?>
+<p:sld xmlns:a="http://schemas.openxmlformats.org/drawingml/2006/main" xmlns:r="http://schemas.openxmlformats.org/officeDocument/2006/relationships" xmlns:p="http://schemas.openxmlformats.org/presentationml/2006/main">
+  <p:cSld>
+    <p:spTree>
+      <p:nvGrpSpPr>
+        <p:cNvPr id="1" name=""/>
+        <p:cNvGrpSpPr/>
+        <p:nvPr/>
+      </p:nvGrpSpPr>
+      <p:grpSpPr>
+        <a:xfrm>
+          <a:off x="0" y="0"/>
+          <a:ext cx="0" cy="0"/>
+          <a:chOff x="0" y="0"/>
+          <a:chExt cx="0" cy="0"/>
+        </a:xfrm>
+      </p:grpSpPr>
+      <p:sp>
+        <p:nvSpPr>
+          <p:cNvPr id="2" name="Cím 1">
+            <a:extLst>
+              <a:ext uri="{FF2B5EF4-FFF2-40B4-BE49-F238E27FC236}">
+                <a16:creationId xmlns:a16="http://schemas.microsoft.com/office/drawing/2014/main" id="{69EB0A09-B667-DEA9-EF7F-81B705D7EA83}"/>
+              </a:ext>
+            </a:extLst>
+          </p:cNvPr>
+          <p:cNvSpPr>
+            <a:spLocks noGrp="1"/>
+          </p:cNvSpPr>
+          <p:nvPr>
+            <p:ph type="title"/>
+          </p:nvPr>
+        </p:nvSpPr>
+        <p:spPr>
+          <a:xfrm>
+            <a:off x="838200" y="2766218"/>
+            <a:ext cx="10515600" cy="1325563"/>
+          </a:xfrm>
+          <a:solidFill>
+            <a:srgbClr val="FFF3F3"/>
+          </a:solidFill>
+          <a:ln>
+            <a:noFill/>
+          </a:ln>
+          <a:effectLst>
+            <a:outerShdw blurRad="149987" dist="250190" dir="8460000" algn="ctr">
+              <a:srgbClr val="000000">
+                <a:alpha val="28000"/>
+              </a:srgbClr>
+            </a:outerShdw>
+          </a:effectLst>
+        </p:spPr>
+        <p:txBody>
           <a:bodyPr/>
           <a:lstStyle/>
           <a:p>
@@ -3895,6 +5234,66 @@
           </a:p>
         </p:txBody>
       </p:sp>
+      <p:pic>
+        <p:nvPicPr>
+          <p:cNvPr id="4" name="Kép 3" descr="A képen szöveg, Kis- és közepes méretű macskák, Macskafélék, macska látható&#10;&#10;Előfordulhat, hogy a mesterséges intelligencia által létrehozott tartalom helytelen.">
+            <a:extLst>
+              <a:ext uri="{FF2B5EF4-FFF2-40B4-BE49-F238E27FC236}">
+                <a16:creationId xmlns:a16="http://schemas.microsoft.com/office/drawing/2014/main" id="{BE415B8E-2480-74DF-39F4-1D3E37C6EFBB}"/>
+              </a:ext>
+            </a:extLst>
+          </p:cNvPr>
+          <p:cNvPicPr>
+            <a:picLocks noChangeAspect="1"/>
+          </p:cNvPicPr>
+          <p:nvPr/>
+        </p:nvPicPr>
+        <p:blipFill>
+          <a:blip r:embed="rId2">
+            <a:extLst>
+              <a:ext uri="{28A0092B-C50C-407E-A947-70E740481C1C}">
+                <a14:useLocalDpi xmlns:a14="http://schemas.microsoft.com/office/drawing/2010/main" val="0"/>
+              </a:ext>
+            </a:extLst>
+          </a:blip>
+          <a:stretch>
+            <a:fillRect/>
+          </a:stretch>
+        </p:blipFill>
+        <p:spPr>
+          <a:xfrm>
+            <a:off x="5004327" y="4247586"/>
+            <a:ext cx="2183346" cy="2487151"/>
+          </a:xfrm>
+          <a:prstGeom prst="roundRect">
+            <a:avLst>
+              <a:gd name="adj" fmla="val 12886"/>
+            </a:avLst>
+          </a:prstGeom>
+          <a:ln>
+            <a:noFill/>
+          </a:ln>
+          <a:effectLst>
+            <a:outerShdw blurRad="76200" dist="38100" dir="7800000" algn="tl" rotWithShape="0">
+              <a:srgbClr val="000000">
+                <a:alpha val="40000"/>
+              </a:srgbClr>
+            </a:outerShdw>
+          </a:effectLst>
+          <a:scene3d>
+            <a:camera prst="orthographicFront"/>
+            <a:lightRig rig="contrasting" dir="t">
+              <a:rot lat="0" lon="0" rev="4200000"/>
+            </a:lightRig>
+          </a:scene3d>
+          <a:sp3d prstMaterial="plastic">
+            <a:bevelT w="381000" h="114300" prst="relaxedInset"/>
+            <a:contourClr>
+              <a:srgbClr val="969696"/>
+            </a:contourClr>
+          </a:sp3d>
+        </p:spPr>
+      </p:pic>
     </p:spTree>
     <p:extLst>
       <p:ext uri="{BB962C8B-B14F-4D97-AF65-F5344CB8AC3E}">
